--- a/docs/Soutenance_RESULTATS-BF_Groupe6.pptx
+++ b/docs/Soutenance_RESULTATS-BF_Groupe6.pptx
@@ -121,29 +121,29 @@
   <p:extLst>
     <p:ext uri="{521415D9-36F7-43E2-AB2F-B90AF26B5E84}">
       <p14:sectionLst xmlns:p14="http://schemas.microsoft.com/office/powerpoint/2010/main">
-        <p14:section name="Ouverture" id="{c52165f2-ce2a-94d5-684a-ebd568034186}">
+        <p14:section name="Ouverture" id="{8c3bde4d-b4fc-e1b9-13f1-fb262c720efb}">
           <p14:sldIdLst>
             <p14:sldId id="256"/>
           </p14:sldIdLst>
         </p14:section>
-        <p14:section name="Le problème" id="{9eb3cc05-fb86-b415-8e79-9805efdae309}">
+        <p14:section name="Le problème" id="{68f88d17-4b27-c48d-4dd4-7f70df571f15}">
           <p14:sldIdLst>
             <p14:sldId id="257"/>
           </p14:sldIdLst>
         </p14:section>
-        <p14:section name="Architecture" id="{b7ec864d-2a25-1224-1784-cacbbbdcae41}">
+        <p14:section name="Architecture" id="{2e8a3559-d563-ef5f-58fd-9bb6d728f452}">
           <p14:sldIdLst>
             <p14:sldId id="258"/>
             <p14:sldId id="259"/>
             <p14:sldId id="260"/>
           </p14:sldIdLst>
         </p14:section>
-        <p14:section name="Résilience" id="{90520979-6857-d8ed-a69f-dab004067904}">
+        <p14:section name="Résilience" id="{f1f0c292-59f6-8bc0-2855-dd60b064330a}">
           <p14:sldIdLst>
             <p14:sldId id="261"/>
           </p14:sldIdLst>
         </p14:section>
-        <p14:section name="Résultats" id="{bef95e16-8dd3-7fee-c695-21aff3d577dd}">
+        <p14:section name="Résultats" id="{6cffbfbb-8949-22fa-828e-3ba762d89d9c}">
           <p14:sldIdLst>
             <p14:sldId id="262"/>
             <p14:sldId id="263"/>
@@ -151,19 +151,19 @@
             <p14:sldId id="265"/>
           </p14:sldIdLst>
         </p14:section>
-        <p14:section name="Ce que nous avons appris" id="{edcec9fd-8756-f51a-7a39-f9a50b2e1e71}">
+        <p14:section name="Ce que nous avons appris" id="{556bd92f-e582-ace1-ecdf-e49aec7962e5}">
           <p14:sldIdLst>
             <p14:sldId id="266"/>
             <p14:sldId id="267"/>
           </p14:sldIdLst>
         </p14:section>
-        <p14:section name="Démonstration" id="{c0661487-cd88-ade2-f6ad-f20fb4d4aea9}">
+        <p14:section name="Démonstration" id="{c6b5f296-1618-ab85-5d59-c5599b523fc5}">
           <p14:sldIdLst>
             <p14:sldId id="268"/>
             <p14:sldId id="269"/>
           </p14:sldIdLst>
         </p14:section>
-        <p14:section name="Clôture" id="{5e09488c-c44a-0a8c-4818-c36a7ca74bb6}">
+        <p14:section name="Clôture" id="{d94b6dc0-23d3-4bc1-c866-5cdfba1141ec}">
           <p14:sldIdLst>
             <p14:sldId id="270"/>
           </p14:sldIdLst>
@@ -4702,11 +4702,11 @@
         <p:spPr>
           <a:xfrm>
             <a:off x="685800" y="1371600"/>
-            <a:ext cx="10853928" cy="1005840"/>
+            <a:ext cx="10853928" cy="914400"/>
           </a:xfrm>
           <a:prstGeom prst="roundRect">
             <a:avLst>
-              <a:gd name="adj" fmla="val 9091"/>
+              <a:gd name="adj" fmla="val 10000"/>
             </a:avLst>
           </a:prstGeom>
           <a:solidFill>
@@ -4735,7 +4735,7 @@
         </p:nvSpPr>
         <p:spPr>
           <a:xfrm>
-            <a:off x="960120" y="1591056"/>
+            <a:off x="960120" y="1545336"/>
             <a:ext cx="566928" cy="566928"/>
           </a:xfrm>
           <a:prstGeom prst="ellipse">
@@ -4760,7 +4760,7 @@
         </p:nvSpPr>
         <p:spPr>
           <a:xfrm>
-            <a:off x="960120" y="1591056"/>
+            <a:off x="960120" y="1545336"/>
             <a:ext cx="566928" cy="566928"/>
           </a:xfrm>
           <a:prstGeom prst="rect">
@@ -4796,7 +4796,7 @@
         </p:nvSpPr>
         <p:spPr>
           <a:xfrm>
-            <a:off x="1737360" y="1527048"/>
+            <a:off x="1737360" y="1481328"/>
             <a:ext cx="3749040" cy="685800"/>
           </a:xfrm>
           <a:prstGeom prst="rect">
@@ -4832,7 +4832,7 @@
         </p:nvSpPr>
         <p:spPr>
           <a:xfrm>
-            <a:off x="5669280" y="1527048"/>
+            <a:off x="5669280" y="1481328"/>
             <a:ext cx="5669280" cy="685800"/>
           </a:xfrm>
           <a:prstGeom prst="rect">
@@ -4868,12 +4868,12 @@
         </p:nvSpPr>
         <p:spPr>
           <a:xfrm>
-            <a:off x="685800" y="2560320"/>
-            <a:ext cx="10853928" cy="1005840"/>
+            <a:off x="685800" y="2468880"/>
+            <a:ext cx="10853928" cy="914400"/>
           </a:xfrm>
           <a:prstGeom prst="roundRect">
             <a:avLst>
-              <a:gd name="adj" fmla="val 9091"/>
+              <a:gd name="adj" fmla="val 10000"/>
             </a:avLst>
           </a:prstGeom>
           <a:solidFill>
@@ -4902,7 +4902,7 @@
         </p:nvSpPr>
         <p:spPr>
           <a:xfrm>
-            <a:off x="960120" y="2779776"/>
+            <a:off x="960120" y="2642616"/>
             <a:ext cx="566928" cy="566928"/>
           </a:xfrm>
           <a:prstGeom prst="ellipse">
@@ -4927,7 +4927,7 @@
         </p:nvSpPr>
         <p:spPr>
           <a:xfrm>
-            <a:off x="960120" y="2779776"/>
+            <a:off x="960120" y="2642616"/>
             <a:ext cx="566928" cy="566928"/>
           </a:xfrm>
           <a:prstGeom prst="rect">
@@ -4963,7 +4963,7 @@
         </p:nvSpPr>
         <p:spPr>
           <a:xfrm>
-            <a:off x="1737360" y="2715768"/>
+            <a:off x="1737360" y="2578608"/>
             <a:ext cx="3749040" cy="685800"/>
           </a:xfrm>
           <a:prstGeom prst="rect">
@@ -4999,7 +4999,7 @@
         </p:nvSpPr>
         <p:spPr>
           <a:xfrm>
-            <a:off x="5669280" y="2715768"/>
+            <a:off x="5669280" y="2578608"/>
             <a:ext cx="5669280" cy="685800"/>
           </a:xfrm>
           <a:prstGeom prst="rect">
@@ -5035,12 +5035,12 @@
         </p:nvSpPr>
         <p:spPr>
           <a:xfrm>
-            <a:off x="685800" y="3749040"/>
-            <a:ext cx="10853928" cy="1005840"/>
+            <a:off x="685800" y="3566160"/>
+            <a:ext cx="10853928" cy="914400"/>
           </a:xfrm>
           <a:prstGeom prst="roundRect">
             <a:avLst>
-              <a:gd name="adj" fmla="val 9091"/>
+              <a:gd name="adj" fmla="val 10000"/>
             </a:avLst>
           </a:prstGeom>
           <a:solidFill>
@@ -5069,7 +5069,7 @@
         </p:nvSpPr>
         <p:spPr>
           <a:xfrm>
-            <a:off x="960120" y="3968496"/>
+            <a:off x="960120" y="3739896"/>
             <a:ext cx="566928" cy="566928"/>
           </a:xfrm>
           <a:prstGeom prst="ellipse">
@@ -5094,7 +5094,7 @@
         </p:nvSpPr>
         <p:spPr>
           <a:xfrm>
-            <a:off x="960120" y="3968496"/>
+            <a:off x="960120" y="3739896"/>
             <a:ext cx="566928" cy="566928"/>
           </a:xfrm>
           <a:prstGeom prst="rect">
@@ -5130,7 +5130,7 @@
         </p:nvSpPr>
         <p:spPr>
           <a:xfrm>
-            <a:off x="1737360" y="3904488"/>
+            <a:off x="1737360" y="3675888"/>
             <a:ext cx="3749040" cy="685800"/>
           </a:xfrm>
           <a:prstGeom prst="rect">
@@ -5166,7 +5166,7 @@
         </p:nvSpPr>
         <p:spPr>
           <a:xfrm>
-            <a:off x="5669280" y="3904488"/>
+            <a:off x="5669280" y="3675888"/>
             <a:ext cx="5669280" cy="685800"/>
           </a:xfrm>
           <a:prstGeom prst="rect">
@@ -5202,12 +5202,12 @@
         </p:nvSpPr>
         <p:spPr>
           <a:xfrm>
-            <a:off x="685800" y="4937760"/>
-            <a:ext cx="10853928" cy="1005840"/>
+            <a:off x="685800" y="4663440"/>
+            <a:ext cx="10853928" cy="914400"/>
           </a:xfrm>
           <a:prstGeom prst="roundRect">
             <a:avLst>
-              <a:gd name="adj" fmla="val 9091"/>
+              <a:gd name="adj" fmla="val 10000"/>
             </a:avLst>
           </a:prstGeom>
           <a:solidFill>
@@ -5236,7 +5236,7 @@
         </p:nvSpPr>
         <p:spPr>
           <a:xfrm>
-            <a:off x="960120" y="5157216"/>
+            <a:off x="960120" y="4837176"/>
             <a:ext cx="566928" cy="566928"/>
           </a:xfrm>
           <a:prstGeom prst="ellipse">
@@ -5261,7 +5261,7 @@
         </p:nvSpPr>
         <p:spPr>
           <a:xfrm>
-            <a:off x="960120" y="5157216"/>
+            <a:off x="960120" y="4837176"/>
             <a:ext cx="566928" cy="566928"/>
           </a:xfrm>
           <a:prstGeom prst="rect">
@@ -5297,7 +5297,7 @@
         </p:nvSpPr>
         <p:spPr>
           <a:xfrm>
-            <a:off x="1737360" y="5093208"/>
+            <a:off x="1737360" y="4773168"/>
             <a:ext cx="3749040" cy="685800"/>
           </a:xfrm>
           <a:prstGeom prst="rect">
@@ -5333,7 +5333,7 @@
         </p:nvSpPr>
         <p:spPr>
           <a:xfrm>
-            <a:off x="5669280" y="5093208"/>
+            <a:off x="5669280" y="4773168"/>
             <a:ext cx="5669280" cy="685800"/>
           </a:xfrm>
           <a:prstGeom prst="rect">
@@ -5369,7 +5369,7 @@
         </p:nvSpPr>
         <p:spPr>
           <a:xfrm>
-            <a:off x="685800" y="6172200"/>
+            <a:off x="685800" y="5897880"/>
             <a:ext cx="10881360" cy="320040"/>
           </a:xfrm>
           <a:prstGeom prst="rect">
